--- a/中越詩歌/有福的確據_Nầy Là Truyện Ký Tôi.pptx
+++ b/中越詩歌/有福的確據_Nầy Là Truyện Ký Tôi.pptx
@@ -317,7 +317,7 @@
           <a:p>
             <a:fld id="{4FF67E25-0EB7-49C6-B24B-548DF23EC124}" type="datetimeFigureOut">
               <a:rPr lang="en-US" smtClean="0"/>
-              <a:t>2/10/2024</a:t>
+              <a:t>1/26/2025</a:t>
             </a:fld>
             <a:endParaRPr lang="en-US"/>
           </a:p>
@@ -487,7 +487,7 @@
           <a:p>
             <a:fld id="{4FF67E25-0EB7-49C6-B24B-548DF23EC124}" type="datetimeFigureOut">
               <a:rPr lang="en-US" smtClean="0"/>
-              <a:t>2/10/2024</a:t>
+              <a:t>1/26/2025</a:t>
             </a:fld>
             <a:endParaRPr lang="en-US"/>
           </a:p>
@@ -667,7 +667,7 @@
           <a:p>
             <a:fld id="{4FF67E25-0EB7-49C6-B24B-548DF23EC124}" type="datetimeFigureOut">
               <a:rPr lang="en-US" smtClean="0"/>
-              <a:t>2/10/2024</a:t>
+              <a:t>1/26/2025</a:t>
             </a:fld>
             <a:endParaRPr lang="en-US"/>
           </a:p>
@@ -837,7 +837,7 @@
           <a:p>
             <a:fld id="{4FF67E25-0EB7-49C6-B24B-548DF23EC124}" type="datetimeFigureOut">
               <a:rPr lang="en-US" smtClean="0"/>
-              <a:t>2/10/2024</a:t>
+              <a:t>1/26/2025</a:t>
             </a:fld>
             <a:endParaRPr lang="en-US"/>
           </a:p>
@@ -1083,7 +1083,7 @@
           <a:p>
             <a:fld id="{4FF67E25-0EB7-49C6-B24B-548DF23EC124}" type="datetimeFigureOut">
               <a:rPr lang="en-US" smtClean="0"/>
-              <a:t>2/10/2024</a:t>
+              <a:t>1/26/2025</a:t>
             </a:fld>
             <a:endParaRPr lang="en-US"/>
           </a:p>
@@ -1371,7 +1371,7 @@
           <a:p>
             <a:fld id="{4FF67E25-0EB7-49C6-B24B-548DF23EC124}" type="datetimeFigureOut">
               <a:rPr lang="en-US" smtClean="0"/>
-              <a:t>2/10/2024</a:t>
+              <a:t>1/26/2025</a:t>
             </a:fld>
             <a:endParaRPr lang="en-US"/>
           </a:p>
@@ -1793,7 +1793,7 @@
           <a:p>
             <a:fld id="{4FF67E25-0EB7-49C6-B24B-548DF23EC124}" type="datetimeFigureOut">
               <a:rPr lang="en-US" smtClean="0"/>
-              <a:t>2/10/2024</a:t>
+              <a:t>1/26/2025</a:t>
             </a:fld>
             <a:endParaRPr lang="en-US"/>
           </a:p>
@@ -1911,7 +1911,7 @@
           <a:p>
             <a:fld id="{4FF67E25-0EB7-49C6-B24B-548DF23EC124}" type="datetimeFigureOut">
               <a:rPr lang="en-US" smtClean="0"/>
-              <a:t>2/10/2024</a:t>
+              <a:t>1/26/2025</a:t>
             </a:fld>
             <a:endParaRPr lang="en-US"/>
           </a:p>
@@ -2006,7 +2006,7 @@
           <a:p>
             <a:fld id="{4FF67E25-0EB7-49C6-B24B-548DF23EC124}" type="datetimeFigureOut">
               <a:rPr lang="en-US" smtClean="0"/>
-              <a:t>2/10/2024</a:t>
+              <a:t>1/26/2025</a:t>
             </a:fld>
             <a:endParaRPr lang="en-US"/>
           </a:p>
@@ -2283,7 +2283,7 @@
           <a:p>
             <a:fld id="{4FF67E25-0EB7-49C6-B24B-548DF23EC124}" type="datetimeFigureOut">
               <a:rPr lang="en-US" smtClean="0"/>
-              <a:t>2/10/2024</a:t>
+              <a:t>1/26/2025</a:t>
             </a:fld>
             <a:endParaRPr lang="en-US"/>
           </a:p>
@@ -2540,7 +2540,7 @@
           <a:p>
             <a:fld id="{4FF67E25-0EB7-49C6-B24B-548DF23EC124}" type="datetimeFigureOut">
               <a:rPr lang="en-US" smtClean="0"/>
-              <a:t>2/10/2024</a:t>
+              <a:t>1/26/2025</a:t>
             </a:fld>
             <a:endParaRPr lang="en-US"/>
           </a:p>
@@ -2756,7 +2756,7 @@
           <a:p>
             <a:fld id="{4FF67E25-0EB7-49C6-B24B-548DF23EC124}" type="datetimeFigureOut">
               <a:rPr lang="en-US" smtClean="0"/>
-              <a:t>2/10/2024</a:t>
+              <a:t>1/26/2025</a:t>
             </a:fld>
             <a:endParaRPr lang="en-US"/>
           </a:p>
@@ -3154,7 +3154,7 @@
           <a:lstStyle/>
           <a:p>
             <a:r>
-              <a:rPr lang="zh-TW" altLang="en-US" sz="7200" b="1" i="1" dirty="0">
+              <a:rPr lang="zh-CN" altLang="en-US" sz="7200" b="1" i="1" dirty="0">
                 <a:solidFill>
                   <a:srgbClr val="000066"/>
                 </a:solidFill>
@@ -3168,7 +3168,58 @@
                 <a:latin typeface="微軟正黑體" pitchFamily="34" charset="-120"/>
                 <a:ea typeface="微軟正黑體" pitchFamily="34" charset="-120"/>
               </a:rPr>
-              <a:t>有福的確據</a:t>
+              <a:t>宣 </a:t>
+            </a:r>
+            <a:r>
+              <a:rPr lang="en-US" altLang="zh-CN" sz="7200" b="1" i="1">
+                <a:solidFill>
+                  <a:srgbClr val="000066"/>
+                </a:solidFill>
+                <a:effectLst>
+                  <a:outerShdw blurRad="38100" dist="38100" dir="2700000" algn="tl">
+                    <a:srgbClr val="000000">
+                      <a:alpha val="43137"/>
+                    </a:srgbClr>
+                  </a:outerShdw>
+                </a:effectLst>
+                <a:latin typeface="微軟正黑體" pitchFamily="34" charset="-120"/>
+                <a:ea typeface="微軟正黑體" pitchFamily="34" charset="-120"/>
+              </a:rPr>
+              <a:t>103 - </a:t>
+            </a:r>
+            <a:r>
+              <a:rPr lang="zh-TW" altLang="en-US" sz="7200" b="1" i="1">
+                <a:solidFill>
+                  <a:srgbClr val="000066"/>
+                </a:solidFill>
+                <a:effectLst>
+                  <a:outerShdw blurRad="38100" dist="38100" dir="2700000" algn="tl">
+                    <a:srgbClr val="000000">
+                      <a:alpha val="43137"/>
+                    </a:srgbClr>
+                  </a:outerShdw>
+                </a:effectLst>
+                <a:latin typeface="微軟正黑體" pitchFamily="34" charset="-120"/>
+                <a:ea typeface="微軟正黑體" pitchFamily="34" charset="-120"/>
+              </a:rPr>
+              <a:t>有</a:t>
+            </a:r>
+            <a:r>
+              <a:rPr lang="zh-TW" altLang="en-US" sz="7200" b="1" i="1" dirty="0">
+                <a:solidFill>
+                  <a:srgbClr val="000066"/>
+                </a:solidFill>
+                <a:effectLst>
+                  <a:outerShdw blurRad="38100" dist="38100" dir="2700000" algn="tl">
+                    <a:srgbClr val="000000">
+                      <a:alpha val="43137"/>
+                    </a:srgbClr>
+                  </a:outerShdw>
+                </a:effectLst>
+                <a:latin typeface="微軟正黑體" pitchFamily="34" charset="-120"/>
+                <a:ea typeface="微軟正黑體" pitchFamily="34" charset="-120"/>
+              </a:rPr>
+              <a:t>福的確據</a:t>
             </a:r>
           </a:p>
         </p:txBody>
@@ -3228,6 +3279,24 @@
                 <a:cs typeface="Calibri" panose="020F0502020204030204" pitchFamily="34" charset="0"/>
               </a:rPr>
               <a:t>Nầy Là Truyện Ký Tôi</a:t>
+            </a:r>
+            <a:r>
+              <a:rPr lang="en-US" sz="5400" b="1" i="1" dirty="0">
+                <a:solidFill>
+                  <a:srgbClr val="660033"/>
+                </a:solidFill>
+                <a:effectLst>
+                  <a:outerShdw blurRad="38100" dist="38100" dir="2700000" algn="tl">
+                    <a:srgbClr val="000000">
+                      <a:alpha val="43137"/>
+                    </a:srgbClr>
+                  </a:outerShdw>
+                </a:effectLst>
+                <a:latin typeface="Calibri" panose="020F0502020204030204" pitchFamily="34" charset="0"/>
+                <a:ea typeface="微軟正黑體" pitchFamily="34" charset="-120"/>
+                <a:cs typeface="Calibri" panose="020F0502020204030204" pitchFamily="34" charset="0"/>
+              </a:rPr>
+              <a:t> (TC 269)</a:t>
             </a:r>
             <a:endParaRPr lang="zh-TW" altLang="en-US" sz="5400" b="1" i="1" dirty="0">
               <a:solidFill>

--- a/中越詩歌/有福的確據_Nầy Là Truyện Ký Tôi.pptx
+++ b/中越詩歌/有福的確據_Nầy Là Truyện Ký Tôi.pptx
@@ -317,7 +317,7 @@
           <a:p>
             <a:fld id="{4FF67E25-0EB7-49C6-B24B-548DF23EC124}" type="datetimeFigureOut">
               <a:rPr lang="en-US" smtClean="0"/>
-              <a:t>1/26/2025</a:t>
+              <a:t>12/6/2025</a:t>
             </a:fld>
             <a:endParaRPr lang="en-US"/>
           </a:p>
@@ -487,7 +487,7 @@
           <a:p>
             <a:fld id="{4FF67E25-0EB7-49C6-B24B-548DF23EC124}" type="datetimeFigureOut">
               <a:rPr lang="en-US" smtClean="0"/>
-              <a:t>1/26/2025</a:t>
+              <a:t>12/6/2025</a:t>
             </a:fld>
             <a:endParaRPr lang="en-US"/>
           </a:p>
@@ -667,7 +667,7 @@
           <a:p>
             <a:fld id="{4FF67E25-0EB7-49C6-B24B-548DF23EC124}" type="datetimeFigureOut">
               <a:rPr lang="en-US" smtClean="0"/>
-              <a:t>1/26/2025</a:t>
+              <a:t>12/6/2025</a:t>
             </a:fld>
             <a:endParaRPr lang="en-US"/>
           </a:p>
@@ -837,7 +837,7 @@
           <a:p>
             <a:fld id="{4FF67E25-0EB7-49C6-B24B-548DF23EC124}" type="datetimeFigureOut">
               <a:rPr lang="en-US" smtClean="0"/>
-              <a:t>1/26/2025</a:t>
+              <a:t>12/6/2025</a:t>
             </a:fld>
             <a:endParaRPr lang="en-US"/>
           </a:p>
@@ -1083,7 +1083,7 @@
           <a:p>
             <a:fld id="{4FF67E25-0EB7-49C6-B24B-548DF23EC124}" type="datetimeFigureOut">
               <a:rPr lang="en-US" smtClean="0"/>
-              <a:t>1/26/2025</a:t>
+              <a:t>12/6/2025</a:t>
             </a:fld>
             <a:endParaRPr lang="en-US"/>
           </a:p>
@@ -1371,7 +1371,7 @@
           <a:p>
             <a:fld id="{4FF67E25-0EB7-49C6-B24B-548DF23EC124}" type="datetimeFigureOut">
               <a:rPr lang="en-US" smtClean="0"/>
-              <a:t>1/26/2025</a:t>
+              <a:t>12/6/2025</a:t>
             </a:fld>
             <a:endParaRPr lang="en-US"/>
           </a:p>
@@ -1793,7 +1793,7 @@
           <a:p>
             <a:fld id="{4FF67E25-0EB7-49C6-B24B-548DF23EC124}" type="datetimeFigureOut">
               <a:rPr lang="en-US" smtClean="0"/>
-              <a:t>1/26/2025</a:t>
+              <a:t>12/6/2025</a:t>
             </a:fld>
             <a:endParaRPr lang="en-US"/>
           </a:p>
@@ -1911,7 +1911,7 @@
           <a:p>
             <a:fld id="{4FF67E25-0EB7-49C6-B24B-548DF23EC124}" type="datetimeFigureOut">
               <a:rPr lang="en-US" smtClean="0"/>
-              <a:t>1/26/2025</a:t>
+              <a:t>12/6/2025</a:t>
             </a:fld>
             <a:endParaRPr lang="en-US"/>
           </a:p>
@@ -2006,7 +2006,7 @@
           <a:p>
             <a:fld id="{4FF67E25-0EB7-49C6-B24B-548DF23EC124}" type="datetimeFigureOut">
               <a:rPr lang="en-US" smtClean="0"/>
-              <a:t>1/26/2025</a:t>
+              <a:t>12/6/2025</a:t>
             </a:fld>
             <a:endParaRPr lang="en-US"/>
           </a:p>
@@ -2283,7 +2283,7 @@
           <a:p>
             <a:fld id="{4FF67E25-0EB7-49C6-B24B-548DF23EC124}" type="datetimeFigureOut">
               <a:rPr lang="en-US" smtClean="0"/>
-              <a:t>1/26/2025</a:t>
+              <a:t>12/6/2025</a:t>
             </a:fld>
             <a:endParaRPr lang="en-US"/>
           </a:p>
@@ -2540,7 +2540,7 @@
           <a:p>
             <a:fld id="{4FF67E25-0EB7-49C6-B24B-548DF23EC124}" type="datetimeFigureOut">
               <a:rPr lang="en-US" smtClean="0"/>
-              <a:t>1/26/2025</a:t>
+              <a:t>12/6/2025</a:t>
             </a:fld>
             <a:endParaRPr lang="en-US"/>
           </a:p>
@@ -2756,7 +2756,7 @@
           <a:p>
             <a:fld id="{4FF67E25-0EB7-49C6-B24B-548DF23EC124}" type="datetimeFigureOut">
               <a:rPr lang="en-US" smtClean="0"/>
-              <a:t>1/26/2025</a:t>
+              <a:t>12/6/2025</a:t>
             </a:fld>
             <a:endParaRPr lang="en-US"/>
           </a:p>
@@ -3577,7 +3577,7 @@
                 <a:ea typeface="微軟正黑體" pitchFamily="34" charset="-120"/>
                 <a:cs typeface="Calibri" panose="020F0502020204030204" pitchFamily="34" charset="0"/>
               </a:rPr>
-              <a:t>thuần</a:t>
+              <a:t>thuận</a:t>
             </a:r>
             <a:r>
               <a:rPr lang="en-US" altLang="zh-TW" sz="4400" b="1" dirty="0">
@@ -4985,51 +4985,29 @@
                 <a:ea typeface="微軟正黑體" pitchFamily="34" charset="-120"/>
                 <a:cs typeface="Calibri" panose="020F0502020204030204" pitchFamily="34" charset="0"/>
               </a:rPr>
-              <a:t> </a:t>
-            </a:r>
-            <a:r>
-              <a:rPr lang="en-US" altLang="zh-TW" sz="4400" b="1" dirty="0" err="1">
-                <a:solidFill>
-                  <a:srgbClr val="660033"/>
-                </a:solidFill>
-                <a:latin typeface="Calibri" panose="020F0502020204030204" pitchFamily="34" charset="0"/>
-                <a:ea typeface="微軟正黑體" pitchFamily="34" charset="-120"/>
-                <a:cs typeface="Calibri" panose="020F0502020204030204" pitchFamily="34" charset="0"/>
-              </a:rPr>
-              <a:t>Chúa</a:t>
-            </a:r>
-            <a:r>
-              <a:rPr lang="en-US" altLang="zh-TW" sz="4400" b="1" dirty="0">
-                <a:solidFill>
-                  <a:srgbClr val="660033"/>
-                </a:solidFill>
-                <a:latin typeface="Calibri" panose="020F0502020204030204" pitchFamily="34" charset="0"/>
-                <a:ea typeface="微軟正黑體" pitchFamily="34" charset="-120"/>
-                <a:cs typeface="Calibri" panose="020F0502020204030204" pitchFamily="34" charset="0"/>
-              </a:rPr>
-              <a:t> </a:t>
-            </a:r>
-            <a:r>
-              <a:rPr lang="en-US" altLang="zh-TW" sz="4400" b="1" dirty="0" err="1">
-                <a:solidFill>
-                  <a:srgbClr val="660033"/>
-                </a:solidFill>
-                <a:latin typeface="Calibri" panose="020F0502020204030204" pitchFamily="34" charset="0"/>
-                <a:ea typeface="微軟正黑體" pitchFamily="34" charset="-120"/>
-                <a:cs typeface="Calibri" panose="020F0502020204030204" pitchFamily="34" charset="0"/>
-              </a:rPr>
-              <a:t>Jêsus</a:t>
-            </a:r>
-            <a:r>
-              <a:rPr lang="en-US" altLang="zh-TW" sz="4400" b="1" dirty="0">
-                <a:solidFill>
-                  <a:srgbClr val="660033"/>
-                </a:solidFill>
-                <a:latin typeface="Calibri" panose="020F0502020204030204" pitchFamily="34" charset="0"/>
-                <a:ea typeface="微軟正黑體" pitchFamily="34" charset="-120"/>
-                <a:cs typeface="Calibri" panose="020F0502020204030204" pitchFamily="34" charset="0"/>
-              </a:rPr>
-              <a:t> </a:t>
+              <a:t> Chúa </a:t>
+            </a:r>
+            <a:r>
+              <a:rPr lang="en-US" altLang="zh-TW" sz="4400" b="1" dirty="0" err="1">
+                <a:solidFill>
+                  <a:srgbClr val="660033"/>
+                </a:solidFill>
+                <a:latin typeface="Calibri" panose="020F0502020204030204" pitchFamily="34" charset="0"/>
+                <a:ea typeface="微軟正黑體" pitchFamily="34" charset="-120"/>
+                <a:cs typeface="Calibri" panose="020F0502020204030204" pitchFamily="34" charset="0"/>
+              </a:rPr>
+              <a:t>Jê</a:t>
+            </a:r>
+            <a:r>
+              <a:rPr lang="en-US" altLang="zh-TW" sz="4400" b="1" dirty="0">
+                <a:solidFill>
+                  <a:srgbClr val="660033"/>
+                </a:solidFill>
+                <a:latin typeface="Calibri" panose="020F0502020204030204" pitchFamily="34" charset="0"/>
+                <a:ea typeface="微軟正黑體" pitchFamily="34" charset="-120"/>
+                <a:cs typeface="Calibri" panose="020F0502020204030204" pitchFamily="34" charset="0"/>
+              </a:rPr>
+              <a:t> - sus </a:t>
             </a:r>
             <a:r>
               <a:rPr lang="en-US" altLang="zh-TW" sz="4400" b="1" dirty="0" err="1">
@@ -7116,7 +7094,7 @@
                 <a:ea typeface="微軟正黑體" pitchFamily="34" charset="-120"/>
                 <a:cs typeface="Calibri" panose="020F0502020204030204" pitchFamily="34" charset="0"/>
               </a:rPr>
-              <a:t>thuần</a:t>
+              <a:t>thuận</a:t>
             </a:r>
             <a:r>
               <a:rPr lang="en-US" altLang="zh-TW" sz="4400" b="1" dirty="0">
@@ -7160,18 +7138,18 @@
                 <a:ea typeface="微軟正黑體" pitchFamily="34" charset="-120"/>
                 <a:cs typeface="Calibri" panose="020F0502020204030204" pitchFamily="34" charset="0"/>
               </a:rPr>
-              <a:t>Jêsus</a:t>
-            </a:r>
-            <a:r>
-              <a:rPr lang="en-US" altLang="zh-TW" sz="4400" b="1" dirty="0">
-                <a:solidFill>
-                  <a:srgbClr val="660033"/>
-                </a:solidFill>
-                <a:latin typeface="Calibri" panose="020F0502020204030204" pitchFamily="34" charset="0"/>
-                <a:ea typeface="微軟正黑體" pitchFamily="34" charset="-120"/>
-                <a:cs typeface="Calibri" panose="020F0502020204030204" pitchFamily="34" charset="0"/>
-              </a:rPr>
-              <a:t> </a:t>
+              <a:t>Jê</a:t>
+            </a:r>
+            <a:r>
+              <a:rPr lang="en-US" altLang="zh-TW" sz="4400" b="1" dirty="0">
+                <a:solidFill>
+                  <a:srgbClr val="660033"/>
+                </a:solidFill>
+                <a:latin typeface="Calibri" panose="020F0502020204030204" pitchFamily="34" charset="0"/>
+                <a:ea typeface="微軟正黑體" pitchFamily="34" charset="-120"/>
+                <a:cs typeface="Calibri" panose="020F0502020204030204" pitchFamily="34" charset="0"/>
+              </a:rPr>
+              <a:t> - sus </a:t>
             </a:r>
             <a:r>
               <a:rPr lang="en-US" altLang="zh-TW" sz="4400" b="1" dirty="0" err="1">
